--- a/statistics_04_sampling_errors.pptx
+++ b/statistics_04_sampling_errors.pptx
@@ -15802,7 +15802,7 @@
         <p:spPr>
           <a:xfrm>
             <a:off x="0" y="524830"/>
-            <a:ext cx="7382932" cy="738664"/>
+            <a:ext cx="7382932" cy="646331"/>
           </a:xfrm>
           <a:prstGeom prst="rect">
             <a:avLst/>
@@ -15816,7 +15816,7 @@
           <a:lstStyle/>
           <a:p>
             <a:r>
-              <a:rPr lang="en-US" b="1" dirty="0">
+              <a:rPr lang="en-US" sz="1200" b="1" dirty="0">
                 <a:solidFill>
                   <a:srgbClr val="FF0000"/>
                 </a:solidFill>
@@ -15824,17 +15824,17 @@
               <a:t>Sample</a:t>
             </a:r>
             <a:r>
-              <a:rPr lang="en-US" dirty="0"/>
+              <a:rPr lang="en-US" sz="1200" dirty="0"/>
               <a:t> – a set of objects/observations which were collected by a defined procedure. </a:t>
             </a:r>
           </a:p>
           <a:p>
             <a:r>
-              <a:rPr lang="en-US" dirty="0"/>
+              <a:rPr lang="en-US" sz="1200" dirty="0"/>
               <a:t>The elements of a sample are known as </a:t>
             </a:r>
             <a:r>
-              <a:rPr lang="en-US" b="1" dirty="0">
+              <a:rPr lang="en-US" sz="1200" b="1" dirty="0">
                 <a:solidFill>
                   <a:srgbClr val="0070C0"/>
                 </a:solidFill>
@@ -15842,11 +15842,11 @@
               <a:t>sample points</a:t>
             </a:r>
             <a:r>
-              <a:rPr lang="en-US" dirty="0"/>
+              <a:rPr lang="en-US" sz="1200" dirty="0"/>
               <a:t>, </a:t>
             </a:r>
             <a:r>
-              <a:rPr lang="en-US" b="1" dirty="0">
+              <a:rPr lang="en-US" sz="1200" b="1" dirty="0">
                 <a:solidFill>
                   <a:srgbClr val="0070C0"/>
                 </a:solidFill>
@@ -15854,11 +15854,11 @@
               <a:t>sampling units</a:t>
             </a:r>
             <a:r>
-              <a:rPr lang="en-US" dirty="0"/>
+              <a:rPr lang="en-US" sz="1200" dirty="0"/>
               <a:t> or </a:t>
             </a:r>
             <a:r>
-              <a:rPr lang="en-US" b="1" dirty="0">
+              <a:rPr lang="en-US" sz="1200" b="1" dirty="0">
                 <a:solidFill>
                   <a:srgbClr val="0070C0"/>
                 </a:solidFill>
@@ -15866,23 +15866,23 @@
               <a:t>observations</a:t>
             </a:r>
             <a:r>
-              <a:rPr lang="en-US" dirty="0"/>
+              <a:rPr lang="en-US" sz="1200" dirty="0"/>
               <a:t>.</a:t>
             </a:r>
           </a:p>
           <a:p>
             <a:r>
-              <a:rPr lang="en-US" dirty="0"/>
+              <a:rPr lang="en-US" sz="1200" dirty="0"/>
               <a:t> - </a:t>
             </a:r>
             <a:r>
-              <a:rPr lang="en-US" dirty="0">
+              <a:rPr lang="en-US" sz="1200" dirty="0">
                 <a:hlinkClick r:id="rId2"/>
               </a:rPr>
               <a:t>https://en.wikipedia.org/wiki/Sample_(statistics)</a:t>
             </a:r>
             <a:r>
-              <a:rPr lang="en-US" dirty="0"/>
+              <a:rPr lang="en-US" sz="1200" dirty="0"/>
               <a:t> </a:t>
             </a:r>
           </a:p>
@@ -15902,8 +15902,8 @@
         </p:nvSpPr>
         <p:spPr>
           <a:xfrm>
-            <a:off x="7058322" y="2067696"/>
-            <a:ext cx="5133678" cy="2523768"/>
+            <a:off x="8508900" y="2054429"/>
+            <a:ext cx="3585564" cy="2308324"/>
           </a:xfrm>
           <a:prstGeom prst="rect">
             <a:avLst/>
@@ -15917,7 +15917,7 @@
           <a:lstStyle/>
           <a:p>
             <a:r>
-              <a:rPr lang="en-US" sz="1800" b="1" dirty="0">
+              <a:rPr lang="en-US" sz="1200" b="1" dirty="0">
                 <a:solidFill>
                   <a:srgbClr val="00B050"/>
                 </a:solidFill>
@@ -15926,29 +15926,29 @@
             </a:r>
           </a:p>
           <a:p>
-            <a:endParaRPr lang="en-US" dirty="0"/>
+            <a:endParaRPr lang="en-US" sz="1200" dirty="0"/>
           </a:p>
           <a:p>
             <a:r>
-              <a:rPr lang="en-US" dirty="0"/>
+              <a:rPr lang="en-US" sz="1200" dirty="0"/>
               <a:t>We don't need resampling to simply calculate the mean or standard error. But it may help when we need to calculate more non-trivial parameters (and especially their distributions, errors, confidence intervals, regression coefficients, etc.).</a:t>
             </a:r>
           </a:p>
           <a:p>
-            <a:endParaRPr lang="en-US" dirty="0"/>
+            <a:endParaRPr lang="en-US" sz="1200" dirty="0"/>
           </a:p>
           <a:p>
             <a:r>
-              <a:rPr lang="en-US" dirty="0"/>
+              <a:rPr lang="en-US" sz="1200" dirty="0"/>
               <a:t>Using resampling is similar to using simple Monte-Carlo approach for estimating complex outcomes. </a:t>
             </a:r>
           </a:p>
           <a:p>
-            <a:endParaRPr lang="en-US" dirty="0"/>
+            <a:endParaRPr lang="en-US" sz="1200" dirty="0"/>
           </a:p>
           <a:p>
             <a:r>
-              <a:rPr lang="en-US" b="1" dirty="0">
+              <a:rPr lang="en-US" sz="1200" b="1" dirty="0">
                 <a:solidFill>
                   <a:srgbClr val="00B050"/>
                 </a:solidFill>
@@ -15972,8 +15972,8 @@
         </p:nvSpPr>
         <p:spPr>
           <a:xfrm>
-            <a:off x="6632449" y="5150990"/>
-            <a:ext cx="5462014" cy="1384995"/>
+            <a:off x="7668767" y="5615548"/>
+            <a:ext cx="4474463" cy="1200329"/>
           </a:xfrm>
           <a:prstGeom prst="rect">
             <a:avLst/>
@@ -15987,7 +15987,7 @@
           <a:lstStyle/>
           <a:p>
             <a:r>
-              <a:rPr lang="en-US" b="1" dirty="0">
+              <a:rPr lang="en-US" sz="1200" b="1" dirty="0">
                 <a:solidFill>
                   <a:srgbClr val="00B050"/>
                 </a:solidFill>
@@ -16001,7 +16001,7 @@
               <a:buChar char="•"/>
             </a:pPr>
             <a:r>
-              <a:rPr lang="en-US" b="1" dirty="0">
+              <a:rPr lang="en-US" sz="1200" b="1" dirty="0">
                 <a:solidFill>
                   <a:srgbClr val="FF0000"/>
                 </a:solidFill>
@@ -16009,7 +16009,7 @@
               <a:t>Shuffling</a:t>
             </a:r>
             <a:r>
-              <a:rPr lang="en-US" dirty="0"/>
+              <a:rPr lang="en-US" sz="1200" dirty="0"/>
               <a:t> - exchanging labels on data points when performing significance tests (a.k.a. permutation tests, exact tests, randomization tests, or re-randomization tests)</a:t>
             </a:r>
           </a:p>
@@ -16019,7 +16019,7 @@
               <a:buChar char="•"/>
             </a:pPr>
             <a:r>
-              <a:rPr lang="en-US" b="1" dirty="0">
+              <a:rPr lang="en-US" sz="1200" b="1" dirty="0">
                 <a:solidFill>
                   <a:srgbClr val="FF0000"/>
                 </a:solidFill>
@@ -16027,7 +16027,7 @@
               <a:t>Cross-Validation</a:t>
             </a:r>
             <a:r>
-              <a:rPr lang="en-US" dirty="0"/>
+              <a:rPr lang="en-US" sz="1200" dirty="0"/>
               <a:t> of models by comparing results between (random)  subsets.</a:t>
             </a:r>
           </a:p>
@@ -16047,8 +16047,8 @@
         </p:nvSpPr>
         <p:spPr>
           <a:xfrm>
-            <a:off x="0" y="1353738"/>
-            <a:ext cx="6205728" cy="5047536"/>
+            <a:off x="-1" y="1353738"/>
+            <a:ext cx="5286026" cy="5447645"/>
           </a:xfrm>
           <a:prstGeom prst="rect">
             <a:avLst/>
@@ -16062,16 +16062,16 @@
           <a:lstStyle/>
           <a:p>
             <a:r>
-              <a:rPr lang="en-US" dirty="0"/>
+              <a:rPr lang="en-US" sz="1200" dirty="0"/>
               <a:t>In statistics we routinely calculate parameters (mean, error) of a sample.</a:t>
             </a:r>
           </a:p>
           <a:p>
-            <a:endParaRPr lang="en-US" dirty="0"/>
+            <a:endParaRPr lang="en-US" sz="1200" dirty="0"/>
           </a:p>
           <a:p>
             <a:r>
-              <a:rPr lang="en-US" b="1" dirty="0">
+              <a:rPr lang="en-US" sz="1200" b="1" dirty="0">
                 <a:solidFill>
                   <a:srgbClr val="FF0000"/>
                 </a:solidFill>
@@ -16079,31 +16079,34 @@
               <a:t>Resampling</a:t>
             </a:r>
             <a:r>
-              <a:rPr lang="en-US" dirty="0"/>
+              <a:rPr lang="en-US" sz="1200" dirty="0"/>
               <a:t> - collecting multiple samples to do statistical estimations:</a:t>
             </a:r>
           </a:p>
           <a:p>
             <a:r>
-              <a:rPr lang="en-US" dirty="0"/>
+              <a:rPr lang="en-US" sz="1200" dirty="0"/>
               <a:t> - </a:t>
             </a:r>
             <a:r>
-              <a:rPr lang="en-US" dirty="0">
+              <a:rPr lang="en-US" sz="1200" dirty="0">
                 <a:hlinkClick r:id="rId3"/>
               </a:rPr>
               <a:t>https://en.wikipedia.org/wiki/Resampling_(statistics)</a:t>
             </a:r>
-            <a:endParaRPr lang="en-US" dirty="0"/>
+            <a:endParaRPr lang="en-US" sz="1200" dirty="0"/>
           </a:p>
           <a:p>
-            <a:endParaRPr lang="en-US" dirty="0"/>
+            <a:endParaRPr lang="en-US" sz="1200" dirty="0"/>
           </a:p>
           <a:p>
             <a:r>
-              <a:rPr lang="en-US" dirty="0"/>
+              <a:rPr lang="en-US" sz="1200" dirty="0"/>
               <a:t>Two most common methods of getting multiple samples:</a:t>
             </a:r>
+          </a:p>
+          <a:p>
+            <a:endParaRPr lang="en-US" sz="1200" dirty="0"/>
           </a:p>
           <a:p>
             <a:pPr marL="285750" indent="-285750">
@@ -16111,17 +16114,49 @@
               <a:buChar char="•"/>
             </a:pPr>
             <a:r>
-              <a:rPr lang="en-US" b="1" dirty="0">
+              <a:rPr lang="en-US" sz="1200" b="1" dirty="0">
                 <a:solidFill>
                   <a:srgbClr val="FF0000"/>
                 </a:solidFill>
               </a:rPr>
-              <a:t>jack-knife (jackknife)</a:t>
-            </a:r>
-            <a:r>
-              <a:rPr lang="en-US" dirty="0"/>
-              <a:t> – selecting subsets by removing one or more points from the original data set</a:t>
-            </a:r>
+              <a:t>jackknife</a:t>
+            </a:r>
+            <a:r>
+              <a:rPr lang="en-US" sz="1200" dirty="0"/>
+              <a:t> – simple tool - selecting subsets by removing one or more points from the original data set. Invented by </a:t>
+            </a:r>
+            <a:r>
+              <a:rPr lang="en-US" sz="1200" b="1" dirty="0">
+                <a:solidFill>
+                  <a:srgbClr val="FF0000"/>
+                </a:solidFill>
+              </a:rPr>
+              <a:t>John Tukey</a:t>
+            </a:r>
+            <a:r>
+              <a:rPr lang="en-US" sz="1200" dirty="0"/>
+              <a:t> –</a:t>
+            </a:r>
+            <a:br>
+              <a:rPr lang="en-US" sz="1200" dirty="0"/>
+            </a:br>
+            <a:r>
+              <a:rPr lang="en-US" sz="1200" dirty="0"/>
+              <a:t> - </a:t>
+            </a:r>
+            <a:r>
+              <a:rPr lang="en-US" sz="1200" dirty="0">
+                <a:hlinkClick r:id="rId4"/>
+              </a:rPr>
+              <a:t>https://en.wikipedia.org/wiki/John_Tukey</a:t>
+            </a:r>
+            <a:r>
+              <a:rPr lang="en-US" sz="1200" dirty="0"/>
+              <a:t>  (inventor of FFT, "bit", ...)</a:t>
+            </a:r>
+          </a:p>
+          <a:p>
+            <a:endParaRPr lang="en-US" sz="1200" dirty="0"/>
           </a:p>
           <a:p>
             <a:pPr marL="285750" indent="-285750">
@@ -16129,7 +16164,7 @@
               <a:buChar char="•"/>
             </a:pPr>
             <a:r>
-              <a:rPr lang="en-US" b="1" dirty="0">
+              <a:rPr lang="en-US" sz="1200" b="1" dirty="0">
                 <a:solidFill>
                   <a:srgbClr val="FF0000"/>
                 </a:solidFill>
@@ -16137,63 +16172,113 @@
               <a:t>bootstrap</a:t>
             </a:r>
             <a:r>
-              <a:rPr lang="en-US" dirty="0"/>
-              <a:t> - sampling with replacement. Any data point may </a:t>
+              <a:rPr lang="en-US" sz="1200" dirty="0"/>
+              <a:t> - sampling with replacement (data points may be included more than once into any sample). Invented by </a:t>
+            </a:r>
+            <a:r>
+              <a:rPr lang="en-US" sz="1200" b="1" dirty="0">
+                <a:solidFill>
+                  <a:srgbClr val="FF0000"/>
+                </a:solidFill>
+              </a:rPr>
+              <a:t>Bradley </a:t>
+            </a:r>
+            <a:r>
+              <a:rPr lang="en-US" sz="1200" b="1" dirty="0" err="1">
+                <a:solidFill>
+                  <a:srgbClr val="FF0000"/>
+                </a:solidFill>
+              </a:rPr>
+              <a:t>Efron</a:t>
+            </a:r>
+            <a:r>
+              <a:rPr lang="en-US" sz="1200" dirty="0"/>
+              <a:t> –</a:t>
             </a:r>
             <a:br>
-              <a:rPr lang="en-US" dirty="0"/>
+              <a:rPr lang="en-US" sz="1200" dirty="0"/>
             </a:br>
             <a:r>
-              <a:rPr lang="en-US" dirty="0"/>
-              <a:t>be included more than once into any sample.</a:t>
+              <a:rPr lang="en-US" sz="1200" dirty="0"/>
+              <a:t>- </a:t>
+            </a:r>
+            <a:r>
+              <a:rPr lang="en-US" sz="1200" dirty="0">
+                <a:hlinkClick r:id="rId5"/>
+              </a:rPr>
+              <a:t>https://en.wikipedia.org/wiki/Bradley_Efron</a:t>
+            </a:r>
+            <a:r>
+              <a:rPr lang="en-US" sz="1200" dirty="0"/>
+              <a:t> - </a:t>
+            </a:r>
+            <a:br>
+              <a:rPr lang="en-US" sz="1200" dirty="0"/>
+            </a:br>
+            <a:r>
+              <a:rPr lang="en-US" sz="1200" dirty="0"/>
+              <a:t>- </a:t>
+            </a:r>
+            <a:r>
+              <a:rPr lang="en-US" sz="1200" dirty="0">
+                <a:hlinkClick r:id="rId6"/>
+              </a:rPr>
+              <a:t>https://en.wikipedia.org/wiki/Bootstrapping_(statistics)</a:t>
+            </a:r>
+            <a:r>
+              <a:rPr lang="en-US" sz="1200" dirty="0"/>
+              <a:t> </a:t>
             </a:r>
           </a:p>
           <a:p>
-            <a:endParaRPr lang="en-US" dirty="0"/>
+            <a:endParaRPr lang="en-US" sz="1200" dirty="0"/>
           </a:p>
           <a:p>
-            <a:r>
-              <a:rPr lang="en-US" dirty="0"/>
-              <a:t>Once we get Ns samples of size N, we can calculate/estimate parameters of each sample (median, variance, percentiles, etc.).</a:t>
-            </a:r>
+            <a:endParaRPr lang="en-US" sz="1200" dirty="0"/>
           </a:p>
           <a:p>
-            <a:endParaRPr lang="en-US" dirty="0"/>
+            <a:r>
+              <a:rPr lang="en-US" sz="1200" dirty="0"/>
+              <a:t>Once we get Ns samples of size N, we can calculate/estimate parameters of each sample (median, variance, percentiles, etc.).</a:t>
+            </a:r>
           </a:p>
           <a:p>
-            <a:r>
-              <a:rPr lang="en-US" dirty="0"/>
-              <a:t>The values of calculated parameters are usually different between samples.</a:t>
-            </a:r>
+            <a:endParaRPr lang="en-US" sz="1200" dirty="0"/>
           </a:p>
           <a:p>
             <a:r>
-              <a:rPr lang="en-US" dirty="0"/>
-              <a:t>We can look at the distributions of these parameters, </a:t>
+              <a:rPr lang="en-US" sz="1200" dirty="0"/>
+              <a:t>The values of calculated parameters are usually different between samples.</a:t>
             </a:r>
           </a:p>
           <a:p>
             <a:r>
-              <a:rPr lang="en-US" dirty="0"/>
-              <a:t>estimate the variability / precision of the estimates.</a:t>
+              <a:rPr lang="en-US" sz="1200" dirty="0"/>
+              <a:t>We can look at the distributions of these parameters, </a:t>
             </a:r>
           </a:p>
           <a:p>
-            <a:endParaRPr lang="en-US" dirty="0"/>
+            <a:r>
+              <a:rPr lang="en-US" sz="1200" dirty="0"/>
+              <a:t>estimate the variability / precision of the estimates.</a:t>
+            </a:r>
           </a:p>
           <a:p>
-            <a:r>
-              <a:rPr lang="en-US" dirty="0"/>
-              <a:t>Under certain conditions when the numbers (Ns and N) are big, </a:t>
-            </a:r>
+            <a:endParaRPr lang="en-US" sz="1200" dirty="0"/>
           </a:p>
           <a:p>
             <a:r>
-              <a:rPr lang="en-US" dirty="0"/>
+              <a:rPr lang="en-US" sz="1200" dirty="0"/>
+              <a:t>Under certain conditions when the numbers (Ns and N) are big, </a:t>
+            </a:r>
+          </a:p>
+          <a:p>
+            <a:r>
+              <a:rPr lang="en-US" sz="1200" dirty="0"/>
               <a:t>the </a:t>
             </a:r>
             <a:r>
-              <a:rPr lang="en-US" b="1" dirty="0">
+              <a:rPr lang="en-US" sz="1200" b="1" dirty="0">
                 <a:solidFill>
                   <a:srgbClr val="0070C0"/>
                 </a:solidFill>
@@ -16201,17 +16286,17 @@
               <a:t>Central Limit Theorem (CLT)</a:t>
             </a:r>
             <a:r>
-              <a:rPr lang="en-US" dirty="0"/>
+              <a:rPr lang="en-US" sz="1200" dirty="0"/>
               <a:t> kicks in, </a:t>
             </a:r>
           </a:p>
           <a:p>
             <a:r>
-              <a:rPr lang="en-US" dirty="0"/>
+              <a:rPr lang="en-US" sz="1200" dirty="0"/>
               <a:t>and distributions may converge to </a:t>
             </a:r>
             <a:r>
-              <a:rPr lang="en-US" b="1" dirty="0">
+              <a:rPr lang="en-US" sz="1200" b="1" dirty="0">
                 <a:solidFill>
                   <a:srgbClr val="0070C0"/>
                 </a:solidFill>
@@ -16219,16 +16304,16 @@
               <a:t>Normal Gaussian</a:t>
             </a:r>
             <a:r>
-              <a:rPr lang="en-US" dirty="0"/>
+              <a:rPr lang="en-US" sz="1200" dirty="0"/>
               <a:t> distributions.</a:t>
             </a:r>
           </a:p>
           <a:p>
-            <a:endParaRPr lang="en-US" dirty="0"/>
+            <a:endParaRPr lang="en-US" sz="1200" dirty="0"/>
           </a:p>
           <a:p>
             <a:r>
-              <a:rPr lang="en-US" dirty="0"/>
+              <a:rPr lang="en-US" sz="1200" dirty="0"/>
               <a:t>But for small sample sizes the distributions don't have to be Gaussian.</a:t>
             </a:r>
           </a:p>
@@ -16249,7 +16334,7 @@
           <p:nvPr/>
         </p:nvPicPr>
         <p:blipFill rotWithShape="1">
-          <a:blip r:embed="rId4" cstate="email">
+          <a:blip r:embed="rId7" cstate="email">
             <a:extLst>
               <a:ext uri="{28A0092B-C50C-407E-A947-70E740481C1C}">
                 <a14:useLocalDpi xmlns:a14="http://schemas.microsoft.com/office/drawing/2010/main"/>
@@ -16279,6 +16364,288 @@
           </a:extLst>
         </p:spPr>
       </p:pic>
+      <p:pic>
+        <p:nvPicPr>
+          <p:cNvPr id="1026" name="Picture 2" descr="Jackknife definition and meaning | Collins English Dictionary">
+            <a:extLst>
+              <a:ext uri="{FF2B5EF4-FFF2-40B4-BE49-F238E27FC236}">
+                <a16:creationId xmlns:a16="http://schemas.microsoft.com/office/drawing/2014/main" id="{3CE90554-EED8-084C-8931-AA23DBC70961}"/>
+              </a:ext>
+            </a:extLst>
+          </p:cNvPr>
+          <p:cNvPicPr>
+            <a:picLocks noChangeAspect="1" noChangeArrowheads="1"/>
+          </p:cNvPicPr>
+          <p:nvPr/>
+        </p:nvPicPr>
+        <p:blipFill rotWithShape="1">
+          <a:blip r:embed="rId8" cstate="email">
+            <a:extLst>
+              <a:ext uri="{28A0092B-C50C-407E-A947-70E740481C1C}">
+                <a14:useLocalDpi xmlns:a14="http://schemas.microsoft.com/office/drawing/2010/main"/>
+              </a:ext>
+            </a:extLst>
+          </a:blip>
+          <a:srcRect/>
+          <a:stretch/>
+        </p:blipFill>
+        <p:spPr bwMode="auto">
+          <a:xfrm>
+            <a:off x="6299638" y="2176983"/>
+            <a:ext cx="1085088" cy="906295"/>
+          </a:xfrm>
+          <a:prstGeom prst="rect">
+            <a:avLst/>
+          </a:prstGeom>
+          <a:noFill/>
+          <a:extLst>
+            <a:ext uri="{909E8E84-426E-40DD-AFC4-6F175D3DCCD1}">
+              <a14:hiddenFill xmlns:a14="http://schemas.microsoft.com/office/drawing/2010/main">
+                <a:solidFill>
+                  <a:srgbClr val="FFFFFF"/>
+                </a:solidFill>
+              </a14:hiddenFill>
+            </a:ext>
+          </a:extLst>
+        </p:spPr>
+      </p:pic>
+      <p:pic>
+        <p:nvPicPr>
+          <p:cNvPr id="5" name="Picture 4" descr="What &quot;Pull Yourself Up By The Bootstraps&quot; Really Means... | Toluna">
+            <a:extLst>
+              <a:ext uri="{FF2B5EF4-FFF2-40B4-BE49-F238E27FC236}">
+                <a16:creationId xmlns:a16="http://schemas.microsoft.com/office/drawing/2014/main" id="{568673C8-DB92-4E49-AD39-A764D7148BA1}"/>
+              </a:ext>
+            </a:extLst>
+          </p:cNvPr>
+          <p:cNvPicPr>
+            <a:picLocks noChangeAspect="1" noChangeArrowheads="1"/>
+          </p:cNvPicPr>
+          <p:nvPr/>
+        </p:nvPicPr>
+        <p:blipFill rotWithShape="1">
+          <a:blip r:embed="rId9" cstate="email">
+            <a:extLst>
+              <a:ext uri="{28A0092B-C50C-407E-A947-70E740481C1C}">
+                <a14:useLocalDpi xmlns:a14="http://schemas.microsoft.com/office/drawing/2010/main"/>
+              </a:ext>
+            </a:extLst>
+          </a:blip>
+          <a:srcRect/>
+          <a:stretch/>
+        </p:blipFill>
+        <p:spPr bwMode="auto">
+          <a:xfrm>
+            <a:off x="6631075" y="3416133"/>
+            <a:ext cx="635359" cy="1214178"/>
+          </a:xfrm>
+          <a:prstGeom prst="rect">
+            <a:avLst/>
+          </a:prstGeom>
+          <a:noFill/>
+          <a:extLst>
+            <a:ext uri="{909E8E84-426E-40DD-AFC4-6F175D3DCCD1}">
+              <a14:hiddenFill xmlns:a14="http://schemas.microsoft.com/office/drawing/2010/main">
+                <a:solidFill>
+                  <a:srgbClr val="FFFFFF"/>
+                </a:solidFill>
+              </a14:hiddenFill>
+            </a:ext>
+          </a:extLst>
+        </p:spPr>
+      </p:pic>
+      <p:pic>
+        <p:nvPicPr>
+          <p:cNvPr id="1030" name="Picture 6">
+            <a:extLst>
+              <a:ext uri="{FF2B5EF4-FFF2-40B4-BE49-F238E27FC236}">
+                <a16:creationId xmlns:a16="http://schemas.microsoft.com/office/drawing/2014/main" id="{D4C389BF-7215-A647-BE4C-4DB6D0884882}"/>
+              </a:ext>
+            </a:extLst>
+          </p:cNvPr>
+          <p:cNvPicPr>
+            <a:picLocks noChangeAspect="1" noChangeArrowheads="1"/>
+          </p:cNvPicPr>
+          <p:nvPr/>
+        </p:nvPicPr>
+        <p:blipFill rotWithShape="1">
+          <a:blip r:embed="rId10" cstate="email">
+            <a:extLst>
+              <a:ext uri="{28A0092B-C50C-407E-A947-70E740481C1C}">
+                <a14:useLocalDpi xmlns:a14="http://schemas.microsoft.com/office/drawing/2010/main"/>
+              </a:ext>
+            </a:extLst>
+          </a:blip>
+          <a:srcRect/>
+          <a:stretch/>
+        </p:blipFill>
+        <p:spPr bwMode="auto">
+          <a:xfrm>
+            <a:off x="5383561" y="2111884"/>
+            <a:ext cx="784797" cy="1159100"/>
+          </a:xfrm>
+          <a:prstGeom prst="rect">
+            <a:avLst/>
+          </a:prstGeom>
+          <a:noFill/>
+          <a:extLst>
+            <a:ext uri="{909E8E84-426E-40DD-AFC4-6F175D3DCCD1}">
+              <a14:hiddenFill xmlns:a14="http://schemas.microsoft.com/office/drawing/2010/main">
+                <a:solidFill>
+                  <a:srgbClr val="FFFFFF"/>
+                </a:solidFill>
+              </a14:hiddenFill>
+            </a:ext>
+          </a:extLst>
+        </p:spPr>
+      </p:pic>
+      <p:pic>
+        <p:nvPicPr>
+          <p:cNvPr id="1032" name="Picture 8">
+            <a:extLst>
+              <a:ext uri="{FF2B5EF4-FFF2-40B4-BE49-F238E27FC236}">
+                <a16:creationId xmlns:a16="http://schemas.microsoft.com/office/drawing/2014/main" id="{B335C03E-0C17-AF43-B98C-B9CC044DCA38}"/>
+              </a:ext>
+            </a:extLst>
+          </p:cNvPr>
+          <p:cNvPicPr>
+            <a:picLocks noChangeAspect="1" noChangeArrowheads="1"/>
+          </p:cNvPicPr>
+          <p:nvPr/>
+        </p:nvPicPr>
+        <p:blipFill rotWithShape="1">
+          <a:blip r:embed="rId11" cstate="email">
+            <a:extLst>
+              <a:ext uri="{28A0092B-C50C-407E-A947-70E740481C1C}">
+                <a14:useLocalDpi xmlns:a14="http://schemas.microsoft.com/office/drawing/2010/main"/>
+              </a:ext>
+            </a:extLst>
+          </a:blip>
+          <a:srcRect t="-339"/>
+          <a:stretch/>
+        </p:blipFill>
+        <p:spPr bwMode="auto">
+          <a:xfrm>
+            <a:off x="5383561" y="3416132"/>
+            <a:ext cx="820589" cy="1214179"/>
+          </a:xfrm>
+          <a:prstGeom prst="rect">
+            <a:avLst/>
+          </a:prstGeom>
+          <a:noFill/>
+          <a:extLst>
+            <a:ext uri="{909E8E84-426E-40DD-AFC4-6F175D3DCCD1}">
+              <a14:hiddenFill xmlns:a14="http://schemas.microsoft.com/office/drawing/2010/main">
+                <a:solidFill>
+                  <a:srgbClr val="FFFFFF"/>
+                </a:solidFill>
+              </a14:hiddenFill>
+            </a:ext>
+          </a:extLst>
+        </p:spPr>
+      </p:pic>
+      <p:sp>
+        <p:nvSpPr>
+          <p:cNvPr id="6" name="TextBox 5">
+            <a:extLst>
+              <a:ext uri="{FF2B5EF4-FFF2-40B4-BE49-F238E27FC236}">
+                <a16:creationId xmlns:a16="http://schemas.microsoft.com/office/drawing/2014/main" id="{855B0E83-5D9F-1944-BE18-8773ABA4BDFC}"/>
+              </a:ext>
+            </a:extLst>
+          </p:cNvPr>
+          <p:cNvSpPr txBox="1"/>
+          <p:nvPr/>
+        </p:nvSpPr>
+        <p:spPr>
+          <a:xfrm>
+            <a:off x="5961202" y="4651228"/>
+            <a:ext cx="1975104" cy="646331"/>
+          </a:xfrm>
+          <a:prstGeom prst="rect">
+            <a:avLst/>
+          </a:prstGeom>
+          <a:noFill/>
+        </p:spPr>
+        <p:txBody>
+          <a:bodyPr wrap="square" rtlCol="0">
+            <a:spAutoFit/>
+          </a:bodyPr>
+          <a:lstStyle/>
+          <a:p>
+            <a:pPr algn="ctr"/>
+            <a:r>
+              <a:rPr lang="en-US" sz="1200" b="1" dirty="0">
+                <a:solidFill>
+                  <a:srgbClr val="FF0000"/>
+                </a:solidFill>
+              </a:rPr>
+              <a:t>Bootstrapping</a:t>
+            </a:r>
+          </a:p>
+          <a:p>
+            <a:pPr algn="ctr"/>
+            <a:r>
+              <a:rPr lang="en-US" sz="1200" b="1" dirty="0">
+                <a:solidFill>
+                  <a:srgbClr val="FF0000"/>
+                </a:solidFill>
+              </a:rPr>
+              <a:t>pulling yourself up </a:t>
+            </a:r>
+          </a:p>
+          <a:p>
+            <a:pPr algn="ctr"/>
+            <a:r>
+              <a:rPr lang="en-US" sz="1200" b="1" dirty="0">
+                <a:solidFill>
+                  <a:srgbClr val="FF0000"/>
+                </a:solidFill>
+              </a:rPr>
+              <a:t>by your own bootstraps</a:t>
+            </a:r>
+          </a:p>
+        </p:txBody>
+      </p:sp>
+      <p:sp>
+        <p:nvSpPr>
+          <p:cNvPr id="13" name="TextBox 12">
+            <a:extLst>
+              <a:ext uri="{FF2B5EF4-FFF2-40B4-BE49-F238E27FC236}">
+                <a16:creationId xmlns:a16="http://schemas.microsoft.com/office/drawing/2014/main" id="{4115A468-6DD4-7E43-AADD-AD9BA74FAA27}"/>
+              </a:ext>
+            </a:extLst>
+          </p:cNvPr>
+          <p:cNvSpPr txBox="1"/>
+          <p:nvPr/>
+        </p:nvSpPr>
+        <p:spPr>
+          <a:xfrm>
+            <a:off x="6458926" y="1803198"/>
+            <a:ext cx="876041" cy="276999"/>
+          </a:xfrm>
+          <a:prstGeom prst="rect">
+            <a:avLst/>
+          </a:prstGeom>
+          <a:noFill/>
+        </p:spPr>
+        <p:txBody>
+          <a:bodyPr wrap="square" rtlCol="0">
+            <a:spAutoFit/>
+          </a:bodyPr>
+          <a:lstStyle/>
+          <a:p>
+            <a:pPr algn="ctr"/>
+            <a:r>
+              <a:rPr lang="en-US" sz="1200" b="1" dirty="0">
+                <a:solidFill>
+                  <a:srgbClr val="FF0000"/>
+                </a:solidFill>
+              </a:rPr>
+              <a:t>jackknife</a:t>
+            </a:r>
+          </a:p>
+        </p:txBody>
+      </p:sp>
     </p:spTree>
     <p:extLst>
       <p:ext uri="{BB962C8B-B14F-4D97-AF65-F5344CB8AC3E}">

--- a/statistics_04_sampling_errors.pptx
+++ b/statistics_04_sampling_errors.pptx
@@ -2625,7 +2625,7 @@
           <a:p>
             <a:fld id="{4EB26A4E-7CA4-0D47-BAAE-19E050D9F531}" type="datetimeFigureOut">
               <a:rPr lang="en-US" smtClean="0"/>
-              <a:t>5/14/21</a:t>
+              <a:t>5/15/21</a:t>
             </a:fld>
             <a:endParaRPr lang="en-US"/>
           </a:p>
@@ -15931,7 +15931,7 @@
           <a:p>
             <a:r>
               <a:rPr lang="en-US" sz="1200" dirty="0"/>
-              <a:t>We don't need resampling to simply calculate the mean or standard error. But it may help when we need to calculate more non-trivial parameters (and especially their distributions, errors, confidence intervals, regression coefficients, etc.).</a:t>
+              <a:t>We don't need resampling to simply calculate the mean or standard error. But resampling may help when we need to calculate non-trivial parameters (and especially their distributions, errors, confidence intervals, regression coefficients, etc.).</a:t>
             </a:r>
           </a:p>
           <a:p>
@@ -16048,7 +16048,7 @@
         <p:spPr>
           <a:xfrm>
             <a:off x="-1" y="1353738"/>
-            <a:ext cx="5286026" cy="5447645"/>
+            <a:ext cx="5284994" cy="5447645"/>
           </a:xfrm>
           <a:prstGeom prst="rect">
             <a:avLst/>
@@ -16234,12 +16234,41 @@
             <a:endParaRPr lang="en-US" sz="1200" dirty="0"/>
           </a:p>
           <a:p>
-            <a:endParaRPr lang="en-US" sz="1200" dirty="0"/>
-          </a:p>
-          <a:p>
+            <a:r>
+              <a:rPr lang="en-US" sz="1200" b="1" dirty="0">
+                <a:solidFill>
+                  <a:srgbClr val="FF0000"/>
+                </a:solidFill>
+              </a:rPr>
+              <a:t>Bootstrap principle</a:t>
+            </a:r>
             <a:r>
               <a:rPr lang="en-US" sz="1200" dirty="0"/>
-              <a:t>Once we get Ns samples of size N, we can calculate/estimate parameters of each sample (median, variance, percentiles, etc.).</a:t>
+              <a:t> – use </a:t>
+            </a:r>
+            <a:r>
+              <a:rPr lang="en-US" sz="1200" b="1" dirty="0">
+                <a:solidFill>
+                  <a:srgbClr val="00B050"/>
+                </a:solidFill>
+              </a:rPr>
+              <a:t>empirical distribution from samples</a:t>
+            </a:r>
+            <a:r>
+              <a:rPr lang="en-US" sz="1200" dirty="0"/>
+              <a:t> to evaluate </a:t>
+            </a:r>
+            <a:r>
+              <a:rPr lang="en-US" sz="1200" b="1" dirty="0">
+                <a:solidFill>
+                  <a:srgbClr val="00B050"/>
+                </a:solidFill>
+              </a:rPr>
+              <a:t>population distribution</a:t>
+            </a:r>
+            <a:r>
+              <a:rPr lang="en-US" sz="1200" dirty="0"/>
+              <a:t>. We get Ns samples of size N, then calculate / estimate parameters of each sample (median, variance, percentiles, etc.).</a:t>
             </a:r>
           </a:p>
           <a:p>
@@ -16254,13 +16283,7 @@
           <a:p>
             <a:r>
               <a:rPr lang="en-US" sz="1200" dirty="0"/>
-              <a:t>We can look at the distributions of these parameters, </a:t>
-            </a:r>
-          </a:p>
-          <a:p>
-            <a:r>
-              <a:rPr lang="en-US" sz="1200" dirty="0"/>
-              <a:t>estimate the variability / precision of the estimates.</a:t>
+              <a:t>We can look at the distributions of these parameters, estimate the variability / precision of the estimates.</a:t>
             </a:r>
           </a:p>
           <a:p>
@@ -16287,13 +16310,7 @@
             </a:r>
             <a:r>
               <a:rPr lang="en-US" sz="1200" dirty="0"/>
-              <a:t> kicks in, </a:t>
-            </a:r>
-          </a:p>
-          <a:p>
-            <a:r>
-              <a:rPr lang="en-US" sz="1200" dirty="0"/>
-              <a:t>and distributions may converge to </a:t>
+              <a:t> kicks in, and distributions may converge to </a:t>
             </a:r>
             <a:r>
               <a:rPr lang="en-US" sz="1200" b="1" dirty="0">
@@ -16305,16 +16322,7 @@
             </a:r>
             <a:r>
               <a:rPr lang="en-US" sz="1200" dirty="0"/>
-              <a:t> distributions.</a:t>
-            </a:r>
-          </a:p>
-          <a:p>
-            <a:endParaRPr lang="en-US" sz="1200" dirty="0"/>
-          </a:p>
-          <a:p>
-            <a:r>
-              <a:rPr lang="en-US" sz="1200" dirty="0"/>
-              <a:t>But for small sample sizes the distributions don't have to be Gaussian.</a:t>
+              <a:t> distributions. But for small sample sizes the distributions don't have to be Gaussian.</a:t>
             </a:r>
           </a:p>
         </p:txBody>

--- a/statistics_04_sampling_errors.pptx
+++ b/statistics_04_sampling_errors.pptx
@@ -13572,8 +13572,8 @@
         </p:nvSpPr>
         <p:spPr>
           <a:xfrm>
-            <a:off x="83341" y="791240"/>
-            <a:ext cx="6991227" cy="3108543"/>
+            <a:off x="95533" y="629571"/>
+            <a:ext cx="6991227" cy="3539430"/>
           </a:xfrm>
           <a:prstGeom prst="rect">
             <a:avLst/>
@@ -13587,29 +13587,71 @@
           <a:lstStyle/>
           <a:p>
             <a:r>
+              <a:rPr lang="en-US" dirty="0">
+                <a:solidFill>
+                  <a:schemeClr val="tx1"/>
+                </a:solidFill>
+              </a:rPr>
+              <a:t>“</a:t>
+            </a:r>
+            <a:r>
               <a:rPr lang="en-US" b="1" dirty="0">
                 <a:solidFill>
-                  <a:srgbClr val="0070C0"/>
+                  <a:srgbClr val="FF0000"/>
                 </a:solidFill>
               </a:rPr>
-              <a:t>“Statistics is the study of the collection, analysis, </a:t>
+              <a:t>Statistics</a:t>
+            </a:r>
+            <a:r>
+              <a:rPr lang="en-US" dirty="0">
+                <a:solidFill>
+                  <a:schemeClr val="tx1"/>
+                </a:solidFill>
+              </a:rPr>
+              <a:t> - the study of the collection, analysis, </a:t>
             </a:r>
           </a:p>
           <a:p>
             <a:r>
-              <a:rPr lang="en-US" b="1" dirty="0">
-                <a:solidFill>
-                  <a:srgbClr val="0070C0"/>
+              <a:rPr lang="en-US" dirty="0">
+                <a:solidFill>
+                  <a:schemeClr val="tx1"/>
                 </a:solidFill>
               </a:rPr>
               <a:t>interpretation, presentation, and organization of data.” </a:t>
             </a:r>
           </a:p>
           <a:p>
-            <a:endParaRPr lang="en-US" dirty="0"/>
+            <a:endParaRPr lang="en-US" dirty="0">
+              <a:solidFill>
+                <a:schemeClr val="tx1"/>
+              </a:solidFill>
+            </a:endParaRPr>
           </a:p>
           <a:p>
-            <a:endParaRPr lang="en-US" dirty="0"/>
+            <a:r>
+              <a:rPr lang="en-US" b="1" dirty="0">
+                <a:solidFill>
+                  <a:srgbClr val="FF0000"/>
+                </a:solidFill>
+              </a:rPr>
+              <a:t>Statistical Inference</a:t>
+            </a:r>
+            <a:r>
+              <a:rPr lang="en-US" dirty="0">
+                <a:solidFill>
+                  <a:schemeClr val="tx1"/>
+                </a:solidFill>
+              </a:rPr>
+              <a:t> - using data from a noisy sample to make estimates or test hypotheses about the whole population.</a:t>
+            </a:r>
+          </a:p>
+          <a:p>
+            <a:endParaRPr lang="en-US" dirty="0">
+              <a:solidFill>
+                <a:schemeClr val="tx1"/>
+              </a:solidFill>
+            </a:endParaRPr>
           </a:p>
           <a:p>
             <a:r>
@@ -15801,13 +15843,18 @@
         </p:nvSpPr>
         <p:spPr>
           <a:xfrm>
-            <a:off x="0" y="524830"/>
-            <a:ext cx="7382932" cy="646331"/>
+            <a:off x="3080" y="558723"/>
+            <a:ext cx="6631075" cy="1015663"/>
           </a:xfrm>
           <a:prstGeom prst="rect">
             <a:avLst/>
           </a:prstGeom>
-          <a:noFill/>
+          <a:solidFill>
+            <a:schemeClr val="accent4">
+              <a:lumMod val="20000"/>
+              <a:lumOff val="80000"/>
+            </a:schemeClr>
+          </a:solidFill>
         </p:spPr>
         <p:txBody>
           <a:bodyPr wrap="square" rtlCol="0">
@@ -15871,6 +15918,9 @@
             </a:r>
           </a:p>
           <a:p>
+            <a:endParaRPr lang="en-US" sz="1200" dirty="0"/>
+          </a:p>
+          <a:p>
             <a:r>
               <a:rPr lang="en-US" sz="1200" dirty="0"/>
               <a:t> - </a:t>
@@ -15885,6 +15935,27 @@
               <a:rPr lang="en-US" sz="1200" dirty="0"/>
               <a:t> </a:t>
             </a:r>
+          </a:p>
+          <a:p>
+            <a:r>
+              <a:rPr lang="en-US" sz="1200" dirty="0"/>
+              <a:t> - </a:t>
+            </a:r>
+            <a:r>
+              <a:rPr lang="en-US" sz="1200" dirty="0">
+                <a:hlinkClick r:id="rId3"/>
+              </a:rPr>
+              <a:t>https://www.youtube.com/watch?v=vTZSnTN67Fk</a:t>
+            </a:r>
+            <a:r>
+              <a:rPr lang="en-US" sz="1200" dirty="0"/>
+              <a:t> – very good lecture by Brian </a:t>
+            </a:r>
+            <a:r>
+              <a:rPr lang="en-US" sz="1200" dirty="0" err="1"/>
+              <a:t>Caffo</a:t>
+            </a:r>
+            <a:endParaRPr lang="en-US" sz="1200" dirty="0"/>
           </a:p>
         </p:txBody>
       </p:sp>
@@ -15902,13 +15973,18 @@
         </p:nvSpPr>
         <p:spPr>
           <a:xfrm>
-            <a:off x="8508900" y="2054429"/>
-            <a:ext cx="3585564" cy="2308324"/>
+            <a:off x="8008486" y="1930198"/>
+            <a:ext cx="4134744" cy="1631216"/>
           </a:xfrm>
           <a:prstGeom prst="rect">
             <a:avLst/>
           </a:prstGeom>
-          <a:noFill/>
+          <a:solidFill>
+            <a:schemeClr val="accent6">
+              <a:lumMod val="20000"/>
+              <a:lumOff val="80000"/>
+            </a:schemeClr>
+          </a:solidFill>
         </p:spPr>
         <p:txBody>
           <a:bodyPr wrap="square" rtlCol="0">
@@ -15919,42 +15995,83 @@
             <a:r>
               <a:rPr lang="en-US" sz="1200" b="1" dirty="0">
                 <a:solidFill>
-                  <a:srgbClr val="00B050"/>
+                  <a:srgbClr val="FF0000"/>
                 </a:solidFill>
               </a:rPr>
-              <a:t>Why resampling is useful?</a:t>
+              <a:t>Bootstrapping popularity</a:t>
+            </a:r>
+            <a:r>
+              <a:rPr lang="en-US" sz="1200" dirty="0">
+                <a:solidFill>
+                  <a:schemeClr val="tx1"/>
+                </a:solidFill>
+              </a:rPr>
+              <a:t> grew around 1980 when computers became widely available. Computers allowed to run thousands of virtual experiments to get statistical results. This is basically the Monte-Carlo approach.</a:t>
             </a:r>
           </a:p>
           <a:p>
-            <a:endParaRPr lang="en-US" sz="1200" dirty="0"/>
+            <a:endParaRPr lang="en-US" sz="1200" dirty="0">
+              <a:solidFill>
+                <a:schemeClr val="tx1"/>
+              </a:solidFill>
+            </a:endParaRPr>
           </a:p>
           <a:p>
             <a:r>
-              <a:rPr lang="en-US" sz="1200" dirty="0"/>
-              <a:t>We don't need resampling to simply calculate the mean or standard error. But resampling may help when we need to calculate non-trivial parameters (and especially their distributions, errors, confidence intervals, regression coefficients, etc.).</a:t>
+              <a:rPr lang="en-US" sz="1000" dirty="0">
+                <a:solidFill>
+                  <a:srgbClr val="00B0F0"/>
+                </a:solidFill>
+                <a:latin typeface="Menlo" panose="020B0609030804020204" pitchFamily="49" charset="0"/>
+                <a:ea typeface="Menlo" panose="020B0609030804020204" pitchFamily="49" charset="0"/>
+                <a:cs typeface="Menlo" panose="020B0609030804020204" pitchFamily="49" charset="0"/>
+              </a:rPr>
+              <a:t>Before 1980  |  after 1980</a:t>
             </a:r>
           </a:p>
           <a:p>
-            <a:endParaRPr lang="en-US" sz="1200" dirty="0"/>
+            <a:r>
+              <a:rPr lang="en-US" sz="1000" dirty="0">
+                <a:solidFill>
+                  <a:srgbClr val="00B0F0"/>
+                </a:solidFill>
+                <a:latin typeface="Menlo" panose="020B0609030804020204" pitchFamily="49" charset="0"/>
+                <a:ea typeface="Menlo" panose="020B0609030804020204" pitchFamily="49" charset="0"/>
+                <a:cs typeface="Menlo" panose="020B0609030804020204" pitchFamily="49" charset="0"/>
+              </a:rPr>
+              <a:t>-------------+---------------------</a:t>
+            </a:r>
           </a:p>
           <a:p>
             <a:r>
-              <a:rPr lang="en-US" sz="1200" dirty="0"/>
-              <a:t>Using resampling is similar to using simple Monte-Carlo approach for estimating complex outcomes. </a:t>
+              <a:rPr lang="en-US" sz="1000" dirty="0">
+                <a:solidFill>
+                  <a:srgbClr val="00B0F0"/>
+                </a:solidFill>
+                <a:latin typeface="Menlo" panose="020B0609030804020204" pitchFamily="49" charset="0"/>
+                <a:ea typeface="Menlo" panose="020B0609030804020204" pitchFamily="49" charset="0"/>
+                <a:cs typeface="Menlo" panose="020B0609030804020204" pitchFamily="49" charset="0"/>
+              </a:rPr>
+              <a:t>manual math  |  computer hacking</a:t>
             </a:r>
           </a:p>
           <a:p>
-            <a:endParaRPr lang="en-US" sz="1200" dirty="0"/>
-          </a:p>
-          <a:p>
-            <a:r>
-              <a:rPr lang="en-US" sz="1200" b="1" dirty="0">
-                <a:solidFill>
-                  <a:srgbClr val="00B050"/>
-                </a:solidFill>
+            <a:r>
+              <a:rPr lang="en-US" sz="1000" dirty="0">
+                <a:solidFill>
+                  <a:srgbClr val="00B0F0"/>
+                </a:solidFill>
+                <a:latin typeface="Menlo" panose="020B0609030804020204" pitchFamily="49" charset="0"/>
+                <a:ea typeface="Menlo" panose="020B0609030804020204" pitchFamily="49" charset="0"/>
+                <a:cs typeface="Menlo" panose="020B0609030804020204" pitchFamily="49" charset="0"/>
               </a:rPr>
-              <a:t>The main benefit of resampling is SIMPLICITY.</a:t>
-            </a:r>
+              <a:t>             |  run virtual random experiments</a:t>
+            </a:r>
+            <a:endParaRPr lang="en-US" sz="1200" dirty="0">
+              <a:solidFill>
+                <a:schemeClr val="tx1"/>
+              </a:solidFill>
+            </a:endParaRPr>
           </a:p>
         </p:txBody>
       </p:sp>
@@ -15978,7 +16095,12 @@
           <a:prstGeom prst="rect">
             <a:avLst/>
           </a:prstGeom>
-          <a:noFill/>
+          <a:solidFill>
+            <a:schemeClr val="accent6">
+              <a:lumMod val="20000"/>
+              <a:lumOff val="80000"/>
+            </a:schemeClr>
+          </a:solidFill>
         </p:spPr>
         <p:txBody>
           <a:bodyPr wrap="square" rtlCol="0">
@@ -16028,7 +16150,7 @@
             </a:r>
             <a:r>
               <a:rPr lang="en-US" sz="1200" dirty="0"/>
-              <a:t> of models by comparing results between (random)  subsets.</a:t>
+              <a:t> of models by comparing models built using random subsets of data.</a:t>
             </a:r>
           </a:p>
         </p:txBody>
@@ -16047,13 +16169,18 @@
         </p:nvSpPr>
         <p:spPr>
           <a:xfrm>
-            <a:off x="-1" y="1353738"/>
-            <a:ext cx="5284994" cy="5447645"/>
+            <a:off x="-25439" y="1849960"/>
+            <a:ext cx="5187982" cy="2677656"/>
           </a:xfrm>
           <a:prstGeom prst="rect">
             <a:avLst/>
           </a:prstGeom>
-          <a:noFill/>
+          <a:solidFill>
+            <a:schemeClr val="accent2">
+              <a:lumMod val="20000"/>
+              <a:lumOff val="80000"/>
+            </a:schemeClr>
+          </a:solidFill>
         </p:spPr>
         <p:txBody>
           <a:bodyPr wrap="square" rtlCol="0">
@@ -16062,35 +16189,26 @@
           <a:lstStyle/>
           <a:p>
             <a:r>
+              <a:rPr lang="en-US" sz="1200" b="1" dirty="0">
+                <a:solidFill>
+                  <a:srgbClr val="FF0000"/>
+                </a:solidFill>
+              </a:rPr>
+              <a:t>Resampling</a:t>
+            </a:r>
+            <a:r>
               <a:rPr lang="en-US" sz="1200" dirty="0"/>
-              <a:t>In statistics we routinely calculate parameters (mean, error) of a sample.</a:t>
+              <a:t> - collecting multiple samples to do statistical estimations:</a:t>
             </a:r>
           </a:p>
           <a:p>
-            <a:endParaRPr lang="en-US" sz="1200" dirty="0"/>
-          </a:p>
-          <a:p>
-            <a:r>
-              <a:rPr lang="en-US" sz="1200" b="1" dirty="0">
-                <a:solidFill>
-                  <a:srgbClr val="FF0000"/>
-                </a:solidFill>
-              </a:rPr>
-              <a:t>Resampling</a:t>
-            </a:r>
-            <a:r>
-              <a:rPr lang="en-US" sz="1200" dirty="0"/>
-              <a:t> - collecting multiple samples to do statistical estimations:</a:t>
-            </a:r>
-          </a:p>
-          <a:p>
             <a:r>
               <a:rPr lang="en-US" sz="1200" dirty="0"/>
               <a:t> - </a:t>
             </a:r>
             <a:r>
               <a:rPr lang="en-US" sz="1200" dirty="0">
-                <a:hlinkClick r:id="rId3"/>
+                <a:hlinkClick r:id="rId4"/>
               </a:rPr>
               <a:t>https://en.wikipedia.org/wiki/Resampling_(statistics)</a:t>
             </a:r>
@@ -16123,7 +16241,19 @@
             </a:r>
             <a:r>
               <a:rPr lang="en-US" sz="1200" dirty="0"/>
-              <a:t> – simple tool - selecting subsets by removing one or more points from the original data set. Invented by </a:t>
+              <a:t> – simple tool - </a:t>
+            </a:r>
+            <a:r>
+              <a:rPr lang="en-US" sz="1200" dirty="0">
+                <a:solidFill>
+                  <a:srgbClr val="0070C0"/>
+                </a:solidFill>
+              </a:rPr>
+              <a:t>selecting subsets by removing one or more points from the original data set</a:t>
+            </a:r>
+            <a:r>
+              <a:rPr lang="en-US" sz="1200" dirty="0"/>
+              <a:t>. Invented by </a:t>
             </a:r>
             <a:r>
               <a:rPr lang="en-US" sz="1200" b="1" dirty="0">
@@ -16146,7 +16276,7 @@
             </a:r>
             <a:r>
               <a:rPr lang="en-US" sz="1200" dirty="0">
-                <a:hlinkClick r:id="rId4"/>
+                <a:hlinkClick r:id="rId5"/>
               </a:rPr>
               <a:t>https://en.wikipedia.org/wiki/John_Tukey</a:t>
             </a:r>
@@ -16173,7 +16303,27 @@
             </a:r>
             <a:r>
               <a:rPr lang="en-US" sz="1200" dirty="0"/>
-              <a:t> - sampling with replacement (data points may be included more than once into any sample). Invented by </a:t>
+              <a:t> - </a:t>
+            </a:r>
+            <a:r>
+              <a:rPr lang="en-US" sz="1200" dirty="0">
+                <a:solidFill>
+                  <a:srgbClr val="0070C0"/>
+                </a:solidFill>
+              </a:rPr>
+              <a:t>sampling with replacement (data points may be included more than once into any sample</a:t>
+            </a:r>
+            <a:r>
+              <a:rPr lang="en-US" sz="1200" dirty="0"/>
+              <a:t>).</a:t>
+            </a:r>
+            <a:r>
+              <a:rPr lang="en-US" sz="1200" b="1" dirty="0">
+                <a:solidFill>
+                  <a:srgbClr val="00B050"/>
+                </a:solidFill>
+              </a:rPr>
+              <a:t> Invented by </a:t>
             </a:r>
             <a:r>
               <a:rPr lang="en-US" sz="1200" b="1" dirty="0">
@@ -16192,8 +16342,31 @@
               <a:t>Efron</a:t>
             </a:r>
             <a:r>
+              <a:rPr lang="en-US" sz="1200" b="1" dirty="0">
+                <a:solidFill>
+                  <a:srgbClr val="00B050"/>
+                </a:solidFill>
+              </a:rPr>
+              <a:t> (1979) </a:t>
+            </a:r>
+            <a:br>
+              <a:rPr lang="en-US" sz="1200" b="1" dirty="0">
+                <a:solidFill>
+                  <a:srgbClr val="00B050"/>
+                </a:solidFill>
+              </a:rPr>
+            </a:br>
+            <a:r>
+              <a:rPr lang="en-US" sz="1200" b="1" dirty="0">
+                <a:solidFill>
+                  <a:srgbClr val="00B050"/>
+                </a:solidFill>
+              </a:rPr>
+              <a:t>"Bootstrap Methods: Another Look at the Jackknife"</a:t>
+            </a:r>
+            <a:r>
               <a:rPr lang="en-US" sz="1200" dirty="0"/>
-              <a:t> –</a:t>
+              <a:t> - </a:t>
             </a:r>
             <a:br>
               <a:rPr lang="en-US" sz="1200" dirty="0"/>
@@ -16204,7 +16377,7 @@
             </a:r>
             <a:r>
               <a:rPr lang="en-US" sz="1200" dirty="0">
-                <a:hlinkClick r:id="rId5"/>
+                <a:hlinkClick r:id="rId6"/>
               </a:rPr>
               <a:t>https://en.wikipedia.org/wiki/Bradley_Efron</a:t>
             </a:r>
@@ -16221,108 +16394,13 @@
             </a:r>
             <a:r>
               <a:rPr lang="en-US" sz="1200" dirty="0">
-                <a:hlinkClick r:id="rId6"/>
+                <a:hlinkClick r:id="rId7"/>
               </a:rPr>
               <a:t>https://en.wikipedia.org/wiki/Bootstrapping_(statistics)</a:t>
             </a:r>
             <a:r>
               <a:rPr lang="en-US" sz="1200" dirty="0"/>
               <a:t> </a:t>
-            </a:r>
-          </a:p>
-          <a:p>
-            <a:endParaRPr lang="en-US" sz="1200" dirty="0"/>
-          </a:p>
-          <a:p>
-            <a:r>
-              <a:rPr lang="en-US" sz="1200" b="1" dirty="0">
-                <a:solidFill>
-                  <a:srgbClr val="FF0000"/>
-                </a:solidFill>
-              </a:rPr>
-              <a:t>Bootstrap principle</a:t>
-            </a:r>
-            <a:r>
-              <a:rPr lang="en-US" sz="1200" dirty="0"/>
-              <a:t> – use </a:t>
-            </a:r>
-            <a:r>
-              <a:rPr lang="en-US" sz="1200" b="1" dirty="0">
-                <a:solidFill>
-                  <a:srgbClr val="00B050"/>
-                </a:solidFill>
-              </a:rPr>
-              <a:t>empirical distribution from samples</a:t>
-            </a:r>
-            <a:r>
-              <a:rPr lang="en-US" sz="1200" dirty="0"/>
-              <a:t> to evaluate </a:t>
-            </a:r>
-            <a:r>
-              <a:rPr lang="en-US" sz="1200" b="1" dirty="0">
-                <a:solidFill>
-                  <a:srgbClr val="00B050"/>
-                </a:solidFill>
-              </a:rPr>
-              <a:t>population distribution</a:t>
-            </a:r>
-            <a:r>
-              <a:rPr lang="en-US" sz="1200" dirty="0"/>
-              <a:t>. We get Ns samples of size N, then calculate / estimate parameters of each sample (median, variance, percentiles, etc.).</a:t>
-            </a:r>
-          </a:p>
-          <a:p>
-            <a:endParaRPr lang="en-US" sz="1200" dirty="0"/>
-          </a:p>
-          <a:p>
-            <a:r>
-              <a:rPr lang="en-US" sz="1200" dirty="0"/>
-              <a:t>The values of calculated parameters are usually different between samples.</a:t>
-            </a:r>
-          </a:p>
-          <a:p>
-            <a:r>
-              <a:rPr lang="en-US" sz="1200" dirty="0"/>
-              <a:t>We can look at the distributions of these parameters, estimate the variability / precision of the estimates.</a:t>
-            </a:r>
-          </a:p>
-          <a:p>
-            <a:endParaRPr lang="en-US" sz="1200" dirty="0"/>
-          </a:p>
-          <a:p>
-            <a:r>
-              <a:rPr lang="en-US" sz="1200" dirty="0"/>
-              <a:t>Under certain conditions when the numbers (Ns and N) are big, </a:t>
-            </a:r>
-          </a:p>
-          <a:p>
-            <a:r>
-              <a:rPr lang="en-US" sz="1200" dirty="0"/>
-              <a:t>the </a:t>
-            </a:r>
-            <a:r>
-              <a:rPr lang="en-US" sz="1200" b="1" dirty="0">
-                <a:solidFill>
-                  <a:srgbClr val="0070C0"/>
-                </a:solidFill>
-              </a:rPr>
-              <a:t>Central Limit Theorem (CLT)</a:t>
-            </a:r>
-            <a:r>
-              <a:rPr lang="en-US" sz="1200" dirty="0"/>
-              <a:t> kicks in, and distributions may converge to </a:t>
-            </a:r>
-            <a:r>
-              <a:rPr lang="en-US" sz="1200" b="1" dirty="0">
-                <a:solidFill>
-                  <a:srgbClr val="0070C0"/>
-                </a:solidFill>
-              </a:rPr>
-              <a:t>Normal Gaussian</a:t>
-            </a:r>
-            <a:r>
-              <a:rPr lang="en-US" sz="1200" dirty="0"/>
-              <a:t> distributions. But for small sample sizes the distributions don't have to be Gaussian.</a:t>
             </a:r>
           </a:p>
         </p:txBody>
@@ -16333,51 +16411,6 @@
             <a:extLst>
               <a:ext uri="{FF2B5EF4-FFF2-40B4-BE49-F238E27FC236}">
                 <a16:creationId xmlns:a16="http://schemas.microsoft.com/office/drawing/2014/main" id="{3C98B8CF-E121-5841-8A78-D7EE94486A09}"/>
-              </a:ext>
-            </a:extLst>
-          </p:cNvPr>
-          <p:cNvPicPr>
-            <a:picLocks noChangeAspect="1" noChangeArrowheads="1"/>
-          </p:cNvPicPr>
-          <p:nvPr/>
-        </p:nvPicPr>
-        <p:blipFill rotWithShape="1">
-          <a:blip r:embed="rId7" cstate="email">
-            <a:extLst>
-              <a:ext uri="{28A0092B-C50C-407E-A947-70E740481C1C}">
-                <a14:useLocalDpi xmlns:a14="http://schemas.microsoft.com/office/drawing/2010/main"/>
-              </a:ext>
-            </a:extLst>
-          </a:blip>
-          <a:srcRect/>
-          <a:stretch/>
-        </p:blipFill>
-        <p:spPr bwMode="auto">
-          <a:xfrm>
-            <a:off x="8716857" y="158497"/>
-            <a:ext cx="2018737" cy="1633118"/>
-          </a:xfrm>
-          <a:prstGeom prst="rect">
-            <a:avLst/>
-          </a:prstGeom>
-          <a:noFill/>
-          <a:extLst>
-            <a:ext uri="{909E8E84-426E-40DD-AFC4-6F175D3DCCD1}">
-              <a14:hiddenFill xmlns:a14="http://schemas.microsoft.com/office/drawing/2010/main">
-                <a:solidFill>
-                  <a:srgbClr val="FFFFFF"/>
-                </a:solidFill>
-              </a14:hiddenFill>
-            </a:ext>
-          </a:extLst>
-        </p:spPr>
-      </p:pic>
-      <p:pic>
-        <p:nvPicPr>
-          <p:cNvPr id="1026" name="Picture 2" descr="Jackknife definition and meaning | Collins English Dictionary">
-            <a:extLst>
-              <a:ext uri="{FF2B5EF4-FFF2-40B4-BE49-F238E27FC236}">
-                <a16:creationId xmlns:a16="http://schemas.microsoft.com/office/drawing/2014/main" id="{3CE90554-EED8-084C-8931-AA23DBC70961}"/>
               </a:ext>
             </a:extLst>
           </p:cNvPr>
@@ -16399,8 +16432,8 @@
         </p:blipFill>
         <p:spPr bwMode="auto">
           <a:xfrm>
-            <a:off x="6299638" y="2176983"/>
-            <a:ext cx="1085088" cy="906295"/>
+            <a:off x="9135957" y="42123"/>
+            <a:ext cx="2018737" cy="1633118"/>
           </a:xfrm>
           <a:prstGeom prst="rect">
             <a:avLst/>
@@ -16419,10 +16452,10 @@
       </p:pic>
       <p:pic>
         <p:nvPicPr>
-          <p:cNvPr id="5" name="Picture 4" descr="What &quot;Pull Yourself Up By The Bootstraps&quot; Really Means... | Toluna">
+          <p:cNvPr id="1026" name="Picture 2" descr="Jackknife definition and meaning | Collins English Dictionary">
             <a:extLst>
               <a:ext uri="{FF2B5EF4-FFF2-40B4-BE49-F238E27FC236}">
-                <a16:creationId xmlns:a16="http://schemas.microsoft.com/office/drawing/2014/main" id="{568673C8-DB92-4E49-AD39-A764D7148BA1}"/>
+                <a16:creationId xmlns:a16="http://schemas.microsoft.com/office/drawing/2014/main" id="{3CE90554-EED8-084C-8931-AA23DBC70961}"/>
               </a:ext>
             </a:extLst>
           </p:cNvPr>
@@ -16444,8 +16477,8 @@
         </p:blipFill>
         <p:spPr bwMode="auto">
           <a:xfrm>
-            <a:off x="6631075" y="3416133"/>
-            <a:ext cx="635359" cy="1214178"/>
+            <a:off x="6299638" y="2303983"/>
+            <a:ext cx="1085088" cy="906295"/>
           </a:xfrm>
           <a:prstGeom prst="rect">
             <a:avLst/>
@@ -16464,10 +16497,10 @@
       </p:pic>
       <p:pic>
         <p:nvPicPr>
-          <p:cNvPr id="1030" name="Picture 6">
+          <p:cNvPr id="5" name="Picture 4" descr="What &quot;Pull Yourself Up By The Bootstraps&quot; Really Means... | Toluna">
             <a:extLst>
               <a:ext uri="{FF2B5EF4-FFF2-40B4-BE49-F238E27FC236}">
-                <a16:creationId xmlns:a16="http://schemas.microsoft.com/office/drawing/2014/main" id="{D4C389BF-7215-A647-BE4C-4DB6D0884882}"/>
+                <a16:creationId xmlns:a16="http://schemas.microsoft.com/office/drawing/2014/main" id="{568673C8-DB92-4E49-AD39-A764D7148BA1}"/>
               </a:ext>
             </a:extLst>
           </p:cNvPr>
@@ -16489,7 +16522,52 @@
         </p:blipFill>
         <p:spPr bwMode="auto">
           <a:xfrm>
-            <a:off x="5383561" y="2111884"/>
+            <a:off x="6631075" y="3543133"/>
+            <a:ext cx="635359" cy="1214178"/>
+          </a:xfrm>
+          <a:prstGeom prst="rect">
+            <a:avLst/>
+          </a:prstGeom>
+          <a:noFill/>
+          <a:extLst>
+            <a:ext uri="{909E8E84-426E-40DD-AFC4-6F175D3DCCD1}">
+              <a14:hiddenFill xmlns:a14="http://schemas.microsoft.com/office/drawing/2010/main">
+                <a:solidFill>
+                  <a:srgbClr val="FFFFFF"/>
+                </a:solidFill>
+              </a14:hiddenFill>
+            </a:ext>
+          </a:extLst>
+        </p:spPr>
+      </p:pic>
+      <p:pic>
+        <p:nvPicPr>
+          <p:cNvPr id="1030" name="Picture 6">
+            <a:extLst>
+              <a:ext uri="{FF2B5EF4-FFF2-40B4-BE49-F238E27FC236}">
+                <a16:creationId xmlns:a16="http://schemas.microsoft.com/office/drawing/2014/main" id="{D4C389BF-7215-A647-BE4C-4DB6D0884882}"/>
+              </a:ext>
+            </a:extLst>
+          </p:cNvPr>
+          <p:cNvPicPr>
+            <a:picLocks noChangeAspect="1" noChangeArrowheads="1"/>
+          </p:cNvPicPr>
+          <p:nvPr/>
+        </p:nvPicPr>
+        <p:blipFill rotWithShape="1">
+          <a:blip r:embed="rId11" cstate="email">
+            <a:extLst>
+              <a:ext uri="{28A0092B-C50C-407E-A947-70E740481C1C}">
+                <a14:useLocalDpi xmlns:a14="http://schemas.microsoft.com/office/drawing/2010/main"/>
+              </a:ext>
+            </a:extLst>
+          </a:blip>
+          <a:srcRect/>
+          <a:stretch/>
+        </p:blipFill>
+        <p:spPr bwMode="auto">
+          <a:xfrm>
+            <a:off x="5383561" y="2238884"/>
             <a:ext cx="784797" cy="1159100"/>
           </a:xfrm>
           <a:prstGeom prst="rect">
@@ -16522,7 +16600,7 @@
           <p:nvPr/>
         </p:nvPicPr>
         <p:blipFill rotWithShape="1">
-          <a:blip r:embed="rId11" cstate="email">
+          <a:blip r:embed="rId12" cstate="email">
             <a:extLst>
               <a:ext uri="{28A0092B-C50C-407E-A947-70E740481C1C}">
                 <a14:useLocalDpi xmlns:a14="http://schemas.microsoft.com/office/drawing/2010/main"/>
@@ -16534,7 +16612,7 @@
         </p:blipFill>
         <p:spPr bwMode="auto">
           <a:xfrm>
-            <a:off x="5383561" y="3416132"/>
+            <a:off x="5383561" y="3543132"/>
             <a:ext cx="820589" cy="1214179"/>
           </a:xfrm>
           <a:prstGeom prst="rect">
@@ -16566,8 +16644,8 @@
         </p:nvSpPr>
         <p:spPr>
           <a:xfrm>
-            <a:off x="5961202" y="4651228"/>
-            <a:ext cx="1975104" cy="646331"/>
+            <a:off x="5872301" y="4778228"/>
+            <a:ext cx="2151719" cy="646331"/>
           </a:xfrm>
           <a:prstGeom prst="rect">
             <a:avLst/>
@@ -16587,7 +16665,7 @@
                   <a:srgbClr val="FF0000"/>
                 </a:solidFill>
               </a:rPr>
-              <a:t>Bootstrapping</a:t>
+              <a:t>Bootstrap</a:t>
             </a:r>
           </a:p>
           <a:p>
@@ -16598,7 +16676,7 @@
                   <a:srgbClr val="FF0000"/>
                 </a:solidFill>
               </a:rPr>
-              <a:t>pulling yourself up </a:t>
+              <a:t>"pulling yourself up </a:t>
             </a:r>
           </a:p>
           <a:p>
@@ -16609,7 +16687,7 @@
                   <a:srgbClr val="FF0000"/>
                 </a:solidFill>
               </a:rPr>
-              <a:t>by your own bootstraps</a:t>
+              <a:t>by your own bootstraps"</a:t>
             </a:r>
           </a:p>
         </p:txBody>
@@ -16628,7 +16706,7 @@
         </p:nvSpPr>
         <p:spPr>
           <a:xfrm>
-            <a:off x="6458926" y="1803198"/>
+            <a:off x="6458926" y="1930198"/>
             <a:ext cx="876041" cy="276999"/>
           </a:xfrm>
           <a:prstGeom prst="rect">
@@ -16650,6 +16728,492 @@
                 </a:solidFill>
               </a:rPr>
               <a:t>jackknife</a:t>
+            </a:r>
+          </a:p>
+        </p:txBody>
+      </p:sp>
+      <p:sp>
+        <p:nvSpPr>
+          <p:cNvPr id="16" name="TextBox 15">
+            <a:extLst>
+              <a:ext uri="{FF2B5EF4-FFF2-40B4-BE49-F238E27FC236}">
+                <a16:creationId xmlns:a16="http://schemas.microsoft.com/office/drawing/2014/main" id="{09C74BA0-17B1-E443-851D-93D19F17F7DD}"/>
+              </a:ext>
+            </a:extLst>
+          </p:cNvPr>
+          <p:cNvSpPr txBox="1"/>
+          <p:nvPr/>
+        </p:nvSpPr>
+        <p:spPr>
+          <a:xfrm>
+            <a:off x="5337938" y="1989531"/>
+            <a:ext cx="876041" cy="276999"/>
+          </a:xfrm>
+          <a:prstGeom prst="rect">
+            <a:avLst/>
+          </a:prstGeom>
+          <a:noFill/>
+        </p:spPr>
+        <p:txBody>
+          <a:bodyPr wrap="square" rtlCol="0">
+            <a:spAutoFit/>
+          </a:bodyPr>
+          <a:lstStyle/>
+          <a:p>
+            <a:pPr algn="ctr"/>
+            <a:r>
+              <a:rPr lang="en-US" sz="1200" b="1" dirty="0">
+                <a:solidFill>
+                  <a:srgbClr val="FF0000"/>
+                </a:solidFill>
+              </a:rPr>
+              <a:t>Tukey</a:t>
+            </a:r>
+          </a:p>
+        </p:txBody>
+      </p:sp>
+      <p:sp>
+        <p:nvSpPr>
+          <p:cNvPr id="17" name="TextBox 16">
+            <a:extLst>
+              <a:ext uri="{FF2B5EF4-FFF2-40B4-BE49-F238E27FC236}">
+                <a16:creationId xmlns:a16="http://schemas.microsoft.com/office/drawing/2014/main" id="{2F005BBF-A86E-AE44-ABE1-7F22B909C5F8}"/>
+              </a:ext>
+            </a:extLst>
+          </p:cNvPr>
+          <p:cNvSpPr txBox="1"/>
+          <p:nvPr/>
+        </p:nvSpPr>
+        <p:spPr>
+          <a:xfrm>
+            <a:off x="5318973" y="4714306"/>
+            <a:ext cx="876041" cy="276999"/>
+          </a:xfrm>
+          <a:prstGeom prst="rect">
+            <a:avLst/>
+          </a:prstGeom>
+          <a:noFill/>
+        </p:spPr>
+        <p:txBody>
+          <a:bodyPr wrap="square" rtlCol="0">
+            <a:spAutoFit/>
+          </a:bodyPr>
+          <a:lstStyle/>
+          <a:p>
+            <a:pPr algn="ctr"/>
+            <a:r>
+              <a:rPr lang="en-US" sz="1200" b="1" dirty="0" err="1">
+                <a:solidFill>
+                  <a:srgbClr val="FF0000"/>
+                </a:solidFill>
+              </a:rPr>
+              <a:t>Efron</a:t>
+            </a:r>
+            <a:endParaRPr lang="en-US" sz="1200" b="1" dirty="0">
+              <a:solidFill>
+                <a:srgbClr val="FF0000"/>
+              </a:solidFill>
+            </a:endParaRPr>
+          </a:p>
+        </p:txBody>
+      </p:sp>
+      <p:sp>
+        <p:nvSpPr>
+          <p:cNvPr id="11" name="TextBox 10">
+            <a:extLst>
+              <a:ext uri="{FF2B5EF4-FFF2-40B4-BE49-F238E27FC236}">
+                <a16:creationId xmlns:a16="http://schemas.microsoft.com/office/drawing/2014/main" id="{ACCE9998-5FF3-B548-A590-B8EA3CC7943D}"/>
+              </a:ext>
+            </a:extLst>
+          </p:cNvPr>
+          <p:cNvSpPr txBox="1"/>
+          <p:nvPr/>
+        </p:nvSpPr>
+        <p:spPr>
+          <a:xfrm>
+            <a:off x="5659110" y="5821419"/>
+            <a:ext cx="1663700" cy="1015663"/>
+          </a:xfrm>
+          <a:prstGeom prst="rect">
+            <a:avLst/>
+          </a:prstGeom>
+          <a:noFill/>
+        </p:spPr>
+        <p:txBody>
+          <a:bodyPr wrap="square" rtlCol="0">
+            <a:spAutoFit/>
+          </a:bodyPr>
+          <a:lstStyle/>
+          <a:p>
+            <a:r>
+              <a:rPr lang="en-US" sz="1200" dirty="0">
+                <a:solidFill>
+                  <a:srgbClr val="FF0000"/>
+                </a:solidFill>
+              </a:rPr>
+              <a:t>Very similar to </a:t>
+            </a:r>
+            <a:r>
+              <a:rPr lang="en-US" sz="1200" b="1" dirty="0">
+                <a:solidFill>
+                  <a:srgbClr val="0070C0"/>
+                </a:solidFill>
+              </a:rPr>
+              <a:t>Baron Munchausen's</a:t>
+            </a:r>
+            <a:r>
+              <a:rPr lang="en-US" sz="1200" dirty="0">
+                <a:solidFill>
+                  <a:srgbClr val="FF0000"/>
+                </a:solidFill>
+              </a:rPr>
+              <a:t> lifting  himself out of the mud by pulling by his own hair</a:t>
+            </a:r>
+          </a:p>
+        </p:txBody>
+      </p:sp>
+      <p:sp>
+        <p:nvSpPr>
+          <p:cNvPr id="12" name="Down Arrow 11">
+            <a:extLst>
+              <a:ext uri="{FF2B5EF4-FFF2-40B4-BE49-F238E27FC236}">
+                <a16:creationId xmlns:a16="http://schemas.microsoft.com/office/drawing/2014/main" id="{E78301AB-B61C-6142-AFFA-FB6273DDA150}"/>
+              </a:ext>
+            </a:extLst>
+          </p:cNvPr>
+          <p:cNvSpPr/>
+          <p:nvPr/>
+        </p:nvSpPr>
+        <p:spPr>
+          <a:xfrm rot="11954743">
+            <a:off x="6602373" y="5445548"/>
+            <a:ext cx="148773" cy="340000"/>
+          </a:xfrm>
+          <a:prstGeom prst="downArrow">
+            <a:avLst/>
+          </a:prstGeom>
+          <a:solidFill>
+            <a:srgbClr val="00B050"/>
+          </a:solidFill>
+          <a:ln>
+            <a:solidFill>
+              <a:srgbClr val="00B050"/>
+            </a:solidFill>
+          </a:ln>
+        </p:spPr>
+        <p:style>
+          <a:lnRef idx="2">
+            <a:schemeClr val="accent1">
+              <a:shade val="50000"/>
+            </a:schemeClr>
+          </a:lnRef>
+          <a:fillRef idx="1">
+            <a:schemeClr val="accent1"/>
+          </a:fillRef>
+          <a:effectRef idx="0">
+            <a:schemeClr val="accent1"/>
+          </a:effectRef>
+          <a:fontRef idx="minor">
+            <a:schemeClr val="lt1"/>
+          </a:fontRef>
+        </p:style>
+        <p:txBody>
+          <a:bodyPr rtlCol="0" anchor="ctr"/>
+          <a:lstStyle/>
+          <a:p>
+            <a:pPr algn="ctr"/>
+            <a:endParaRPr lang="en-US"/>
+          </a:p>
+        </p:txBody>
+      </p:sp>
+      <p:pic>
+        <p:nvPicPr>
+          <p:cNvPr id="14" name="Picture 2" descr="Why the phrase &quot;pull your bootstraps&quot; is nonsense">
+            <a:extLst>
+              <a:ext uri="{FF2B5EF4-FFF2-40B4-BE49-F238E27FC236}">
+                <a16:creationId xmlns:a16="http://schemas.microsoft.com/office/drawing/2014/main" id="{CBAE5846-AA4F-2040-B550-DAE3BA2BA641}"/>
+              </a:ext>
+            </a:extLst>
+          </p:cNvPr>
+          <p:cNvPicPr>
+            <a:picLocks noChangeAspect="1" noChangeArrowheads="1"/>
+          </p:cNvPicPr>
+          <p:nvPr/>
+        </p:nvPicPr>
+        <p:blipFill>
+          <a:blip r:embed="rId13" cstate="email">
+            <a:extLst>
+              <a:ext uri="{28A0092B-C50C-407E-A947-70E740481C1C}">
+                <a14:useLocalDpi xmlns:a14="http://schemas.microsoft.com/office/drawing/2010/main"/>
+              </a:ext>
+            </a:extLst>
+          </a:blip>
+          <a:srcRect/>
+          <a:stretch>
+            <a:fillRect/>
+          </a:stretch>
+        </p:blipFill>
+        <p:spPr bwMode="auto">
+          <a:xfrm>
+            <a:off x="4454175" y="5403354"/>
+            <a:ext cx="1141462" cy="1412523"/>
+          </a:xfrm>
+          <a:prstGeom prst="rect">
+            <a:avLst/>
+          </a:prstGeom>
+          <a:noFill/>
+          <a:extLst>
+            <a:ext uri="{909E8E84-426E-40DD-AFC4-6F175D3DCCD1}">
+              <a14:hiddenFill xmlns:a14="http://schemas.microsoft.com/office/drawing/2010/main">
+                <a:solidFill>
+                  <a:srgbClr val="FFFFFF"/>
+                </a:solidFill>
+              </a14:hiddenFill>
+            </a:ext>
+          </a:extLst>
+        </p:spPr>
+      </p:pic>
+      <p:sp>
+        <p:nvSpPr>
+          <p:cNvPr id="21" name="TextBox 20">
+            <a:extLst>
+              <a:ext uri="{FF2B5EF4-FFF2-40B4-BE49-F238E27FC236}">
+                <a16:creationId xmlns:a16="http://schemas.microsoft.com/office/drawing/2014/main" id="{114BB756-9C75-A04D-A34C-80D213EF5E4A}"/>
+              </a:ext>
+            </a:extLst>
+          </p:cNvPr>
+          <p:cNvSpPr txBox="1"/>
+          <p:nvPr/>
+        </p:nvSpPr>
+        <p:spPr>
+          <a:xfrm>
+            <a:off x="33236" y="4673027"/>
+            <a:ext cx="4276416" cy="1938992"/>
+          </a:xfrm>
+          <a:prstGeom prst="rect">
+            <a:avLst/>
+          </a:prstGeom>
+          <a:solidFill>
+            <a:schemeClr val="accent4">
+              <a:lumMod val="20000"/>
+              <a:lumOff val="80000"/>
+            </a:schemeClr>
+          </a:solidFill>
+        </p:spPr>
+        <p:txBody>
+          <a:bodyPr wrap="square" rtlCol="0">
+            <a:spAutoFit/>
+          </a:bodyPr>
+          <a:lstStyle/>
+          <a:p>
+            <a:r>
+              <a:rPr lang="en-US" sz="1200" b="1" dirty="0">
+                <a:solidFill>
+                  <a:srgbClr val="FF0000"/>
+                </a:solidFill>
+              </a:rPr>
+              <a:t>Bootstrap principle</a:t>
+            </a:r>
+            <a:r>
+              <a:rPr lang="en-US" sz="1200" dirty="0"/>
+              <a:t> – </a:t>
+            </a:r>
+            <a:r>
+              <a:rPr lang="en-US" sz="1200" b="1" dirty="0">
+                <a:solidFill>
+                  <a:srgbClr val="00B050"/>
+                </a:solidFill>
+              </a:rPr>
+              <a:t>use distribution from computer resampling to evaluate the population distribution.</a:t>
+            </a:r>
+            <a:r>
+              <a:rPr lang="en-US" sz="1200" dirty="0"/>
+              <a:t> </a:t>
+            </a:r>
+          </a:p>
+          <a:p>
+            <a:endParaRPr lang="en-US" sz="1200" dirty="0"/>
+          </a:p>
+          <a:p>
+            <a:r>
+              <a:rPr lang="en-US" sz="1200" dirty="0"/>
+              <a:t>The values of calculated parameters usually differ between samples. We can build distributions and estimate the variability of the estimates.</a:t>
+            </a:r>
+          </a:p>
+          <a:p>
+            <a:endParaRPr lang="en-US" sz="1200" dirty="0"/>
+          </a:p>
+          <a:p>
+            <a:r>
+              <a:rPr lang="en-US" sz="1200" dirty="0"/>
+              <a:t>Under certain conditions when the numbers are big, the </a:t>
+            </a:r>
+            <a:r>
+              <a:rPr lang="en-US" sz="1200" b="1" dirty="0">
+                <a:solidFill>
+                  <a:srgbClr val="0070C0"/>
+                </a:solidFill>
+              </a:rPr>
+              <a:t>Central Limit Theorem (CLT)</a:t>
+            </a:r>
+            <a:r>
+              <a:rPr lang="en-US" sz="1200" dirty="0"/>
+              <a:t> can kick in leading to </a:t>
+            </a:r>
+            <a:r>
+              <a:rPr lang="en-US" sz="1200" b="1" dirty="0">
+                <a:solidFill>
+                  <a:srgbClr val="0070C0"/>
+                </a:solidFill>
+              </a:rPr>
+              <a:t>Normal Gaussian</a:t>
+            </a:r>
+            <a:r>
+              <a:rPr lang="en-US" sz="1200" dirty="0"/>
+              <a:t> distributions. But this doesn't have to be the case. </a:t>
+            </a:r>
+          </a:p>
+        </p:txBody>
+      </p:sp>
+      <p:sp>
+        <p:nvSpPr>
+          <p:cNvPr id="15" name="TextBox 14">
+            <a:extLst>
+              <a:ext uri="{FF2B5EF4-FFF2-40B4-BE49-F238E27FC236}">
+                <a16:creationId xmlns:a16="http://schemas.microsoft.com/office/drawing/2014/main" id="{83146B72-845C-3D46-981A-04566C3C4D92}"/>
+              </a:ext>
+            </a:extLst>
+          </p:cNvPr>
+          <p:cNvSpPr txBox="1"/>
+          <p:nvPr/>
+        </p:nvSpPr>
+        <p:spPr>
+          <a:xfrm>
+            <a:off x="7182772" y="229458"/>
+            <a:ext cx="1682496" cy="1169551"/>
+          </a:xfrm>
+          <a:prstGeom prst="rect">
+            <a:avLst/>
+          </a:prstGeom>
+          <a:solidFill>
+            <a:schemeClr val="accent2">
+              <a:lumMod val="20000"/>
+              <a:lumOff val="80000"/>
+            </a:schemeClr>
+          </a:solidFill>
+        </p:spPr>
+        <p:txBody>
+          <a:bodyPr wrap="square" rtlCol="0">
+            <a:spAutoFit/>
+          </a:bodyPr>
+          <a:lstStyle/>
+          <a:p>
+            <a:r>
+              <a:rPr lang="en-US" b="1" dirty="0">
+                <a:solidFill>
+                  <a:srgbClr val="00B050"/>
+                </a:solidFill>
+              </a:rPr>
+              <a:t>In statistics we often try to learn about population by analyzing noisy samples.</a:t>
+            </a:r>
+          </a:p>
+        </p:txBody>
+      </p:sp>
+      <p:sp>
+        <p:nvSpPr>
+          <p:cNvPr id="23" name="TextBox 22">
+            <a:extLst>
+              <a:ext uri="{FF2B5EF4-FFF2-40B4-BE49-F238E27FC236}">
+                <a16:creationId xmlns:a16="http://schemas.microsoft.com/office/drawing/2014/main" id="{89ABF1A4-E840-5E4A-99F0-9903F9923E9A}"/>
+              </a:ext>
+            </a:extLst>
+          </p:cNvPr>
+          <p:cNvSpPr txBox="1"/>
+          <p:nvPr/>
+        </p:nvSpPr>
+        <p:spPr>
+          <a:xfrm>
+            <a:off x="8001003" y="3725971"/>
+            <a:ext cx="4134744" cy="1631216"/>
+          </a:xfrm>
+          <a:prstGeom prst="rect">
+            <a:avLst/>
+          </a:prstGeom>
+          <a:solidFill>
+            <a:schemeClr val="accent5">
+              <a:lumMod val="20000"/>
+              <a:lumOff val="80000"/>
+            </a:schemeClr>
+          </a:solidFill>
+        </p:spPr>
+        <p:txBody>
+          <a:bodyPr wrap="square" rtlCol="0">
+            <a:spAutoFit/>
+          </a:bodyPr>
+          <a:lstStyle/>
+          <a:p>
+            <a:r>
+              <a:rPr lang="en-US" sz="1200" b="1" dirty="0">
+                <a:solidFill>
+                  <a:srgbClr val="FF0000"/>
+                </a:solidFill>
+              </a:rPr>
+              <a:t>Why bootstrapping is useful?</a:t>
+            </a:r>
+            <a:endParaRPr lang="en-US" sz="1200" dirty="0">
+              <a:solidFill>
+                <a:schemeClr val="tx1"/>
+              </a:solidFill>
+            </a:endParaRPr>
+          </a:p>
+          <a:p>
+            <a:br>
+              <a:rPr lang="en-US" sz="800" dirty="0">
+                <a:solidFill>
+                  <a:schemeClr val="tx1"/>
+                </a:solidFill>
+              </a:rPr>
+            </a:br>
+            <a:r>
+              <a:rPr lang="en-US" sz="1200" dirty="0">
+                <a:solidFill>
+                  <a:schemeClr val="tx1"/>
+                </a:solidFill>
+              </a:rPr>
+              <a:t>The main benefit of resampling is </a:t>
+            </a:r>
+            <a:r>
+              <a:rPr lang="en-US" sz="1200" b="1" dirty="0">
+                <a:solidFill>
+                  <a:srgbClr val="00B050"/>
+                </a:solidFill>
+              </a:rPr>
+              <a:t>SIMPLICITY of computer hacking</a:t>
+            </a:r>
+            <a:r>
+              <a:rPr lang="en-US" sz="1200" dirty="0">
+                <a:solidFill>
+                  <a:schemeClr val="tx1"/>
+                </a:solidFill>
+              </a:rPr>
+              <a:t> as opposed to complex math.</a:t>
+            </a:r>
+          </a:p>
+          <a:p>
+            <a:endParaRPr lang="en-US" sz="800" dirty="0">
+              <a:solidFill>
+                <a:schemeClr val="tx1"/>
+              </a:solidFill>
+            </a:endParaRPr>
+          </a:p>
+          <a:p>
+            <a:r>
+              <a:rPr lang="en-US" sz="1200" dirty="0">
+                <a:solidFill>
+                  <a:schemeClr val="tx1"/>
+                </a:solidFill>
+              </a:rPr>
+              <a:t>Note - we don't need resampling to simply calculate the mean or standard error. We use resampling to calculate non-trivial parameters (especially their distributions, errors, confidence intervals, regression coefficients, etc.).</a:t>
             </a:r>
           </a:p>
         </p:txBody>
